--- a/docs/competition/LearnAgent.pptx
+++ b/docs/competition/LearnAgent.pptx
@@ -10694,7 +10694,7 @@
                 <a:ea typeface="Segoe UI"/>
                 <a:cs typeface="Segoe UI"/>
               </a:rPr>
-              <a:t>LOCAL RAG + PUBMED API</a:t>
+              <a:t>LOCAL RAG + EVIDENCE TRACE</a:t>
             </a:r>
           </a:p>
         </p:txBody>
@@ -10850,7 +10850,7 @@
                 <a:ea typeface="Microsoft YaHei"/>
                 <a:cs typeface="Segoe UI"/>
               </a:rPr>
-              <a:t>PubMed 接口提供国际前沿进展。双路证据</a:t>
+              <a:t>混合检索与深度重排保障证据质量。双路</a:t>
             </a:r>
           </a:p>
         </p:txBody>
@@ -10890,7 +10890,7 @@
                 <a:ea typeface="Microsoft YaHei"/>
                 <a:cs typeface="Segoe UI"/>
               </a:rPr>
-              <a:t>互补，构建"权威指南 + 最新研究"闭环。</a:t>
+              <a:t>互补，构建"权威指南 + 精准溯源"闭环。</a:t>
             </a:r>
           </a:p>
         </p:txBody>
@@ -10930,7 +10930,7 @@
                 <a:ea typeface="Microsoft YaHei"/>
                 <a:cs typeface="Segoe UI"/>
               </a:rPr>
-              <a:t>覆盖 8 级循证医学证据</a:t>
+              <a:t>证据来源 100% 可溯源</a:t>
             </a:r>
           </a:p>
         </p:txBody>
@@ -19574,7 +19574,7 @@
                 <a:ea typeface="Microsoft YaHei"/>
                 <a:cs typeface="Segoe UI"/>
               </a:rPr>
-              <a:t>RAG+PubMed双重循证</a:t>
+              <a:t>智能体共享记忆系统</a:t>
             </a:r>
           </a:p>
         </p:txBody>
@@ -19650,7 +19650,7 @@
                 <a:ea typeface="Microsoft YaHei"/>
                 <a:cs typeface="Segoe UI"/>
               </a:rPr>
-              <a:t>本地指南权威溯源与PubMed</a:t>
+              <a:t>信任加权共识与元记忆熵过滤</a:t>
             </a:r>
           </a:p>
         </p:txBody>
@@ -19690,7 +19690,7 @@
                 <a:ea typeface="Microsoft YaHei"/>
                 <a:cs typeface="Segoe UI"/>
               </a:rPr>
-              <a:t>国际前沿研究互补支撑。</a:t>
+              <a:t>沉淀群体教学经验。</a:t>
             </a:r>
           </a:p>
         </p:txBody>
@@ -19732,7 +19732,7 @@
                 <a:ea typeface="Segoe UI"/>
                 <a:cs typeface="Segoe UI"/>
               </a:rPr>
-              <a:t>DUAL EVIDENCE-BASED SUPPORT</a:t>
+              <a:t>SHARED MEMORY CONSENSUS</a:t>
             </a:r>
           </a:p>
         </p:txBody>
@@ -20610,7 +20610,7 @@
                 <a:ea typeface="Microsoft YaHei"/>
                 <a:cs typeface="Segoe UI"/>
               </a:rPr>
-              <a:t>对标赛题各项要求，全面超额完成基础指标，并额外实现多模态、国际循证、代码辅助等亮点。</a:t>
+              <a:t>对标赛题各项要求，全面超额完成基础指标，并额外实现多模态、共享记忆、代码辅助等亮点。</a:t>
             </a:r>
           </a:p>
         </p:txBody>
@@ -22162,7 +22162,7 @@
                 <a:ea typeface="Microsoft YaHei"/>
                 <a:cs typeface="Segoe UI"/>
               </a:rPr>
-              <a:t>PubMed 循证扩展</a:t>
+              <a:t>智能体共享记忆</a:t>
             </a:r>
           </a:p>
         </p:txBody>
@@ -22202,7 +22202,7 @@
                 <a:ea typeface="Microsoft YaHei"/>
                 <a:cs typeface="Segoe UI"/>
               </a:rPr>
-              <a:t>国际文献 8 级证据等级排序，与本地 RAG 形成互补的权威知识体系。</a:t>
+              <a:t>ChromaDB 记忆存储与信任加权共识，跨会话沉淀经验形成群体智能。</a:t>
             </a:r>
           </a:p>
         </p:txBody>
@@ -37860,7 +37860,7 @@
                 <a:ea typeface="Microsoft YaHei"/>
                 <a:cs typeface="Segoe UI"/>
               </a:rPr>
-              <a:t>RAG 证据链与 PubMed 文献</a:t>
+              <a:t>RAG 证据链与质量校验规</a:t>
             </a:r>
           </a:p>
         </p:txBody>
@@ -37900,7 +37900,7 @@
                 <a:ea typeface="Microsoft YaHei"/>
                 <a:cs typeface="Segoe UI"/>
               </a:rPr>
-              <a:t>级证据进行最终裁决，消除</a:t>
+              <a:t>则进行最终裁决，消除</a:t>
             </a:r>
           </a:p>
         </p:txBody>
